--- a/Estrategia y Transformacion/Descripciones de Puestos/Gerente OXXO Cel/ET - L2 Gerente OXXO Cel.pptx
+++ b/Estrategia y Transformacion/Descripciones de Puestos/Gerente OXXO Cel/ET - L2 Gerente OXXO Cel.pptx
@@ -4487,7 +4487,7 @@
               <a:defRPr/>
             </a:pPr>
             <a:r>
-              <a:rPr kumimoji="0" lang="es-MX" sz="1200" b="1" i="0" u="none" strike="noStrike" kern="1200" cap="none" spc="0" normalizeH="0" baseline="0" noProof="0" dirty="0">
+              <a:rPr kumimoji="0" lang="es-MX" sz="1100" b="0" i="0" u="none" strike="noStrike" kern="1200" cap="none" spc="0" normalizeH="0" baseline="0" noProof="0" dirty="0">
                 <a:ln>
                   <a:noFill/>
                 </a:ln>
@@ -4781,7 +4781,7 @@
               <a:defRPr/>
             </a:pPr>
             <a:r>
-              <a:rPr kumimoji="0" lang="es-MX" sz="800" b="0" i="0" u="none" strike="noStrike" kern="1200" cap="none" spc="0" normalizeH="0" baseline="0" noProof="0" dirty="0">
+              <a:rPr kumimoji="0" lang="es-MX" sz="900" b="0" i="0" u="none" strike="noStrike" kern="1200" cap="none" spc="0" normalizeH="0" baseline="0" noProof="0" dirty="0">
                 <a:ln>
                   <a:noFill/>
                 </a:ln>
@@ -4819,7 +4819,7 @@
               <a:defRPr/>
             </a:pPr>
             <a:r>
-              <a:rPr kumimoji="0" lang="es-MX" sz="800" b="0" i="0" u="none" strike="noStrike" kern="1200" cap="none" spc="0" normalizeH="0" baseline="0" noProof="0" dirty="0">
+              <a:rPr kumimoji="0" lang="es-MX" sz="900" b="0" i="0" u="none" strike="noStrike" kern="1200" cap="none" spc="0" normalizeH="0" baseline="0" noProof="0" dirty="0">
                 <a:ln>
                   <a:noFill/>
                 </a:ln>
@@ -4833,7 +4833,7 @@
                 <a:ea typeface="ＭＳ Ｐゴシック" charset="0"/>
                 <a:cs typeface="Arial"/>
               </a:rPr>
-              <a:t>Impulsar el crecimiento de la base de clientes y los ingresos, mediante el diseño y ejecución de estrategias comerciales end-to-end que integren adquisición, pricing, promociones, incentivos, campañas, activaciones en tienda y expansión de dispositivos y servicios.</a:t>
+              <a:t>Impulsar el crecimiento de la base de clientes y los ingresos, mediante estrategias comerciales end-to-end que integren adquisición, pricing, promociones, campañas, activaciones en tienda y expansión de dispositivos y servicios.</a:t>
             </a:r>
           </a:p>
           <a:p>
@@ -4857,7 +4857,7 @@
               <a:defRPr/>
             </a:pPr>
             <a:r>
-              <a:rPr kumimoji="0" lang="es-MX" sz="800" b="0" i="0" u="none" strike="noStrike" kern="1200" cap="none" spc="0" normalizeH="0" baseline="0" noProof="0" dirty="0">
+              <a:rPr kumimoji="0" lang="es-MX" sz="900" b="0" i="0" u="none" strike="noStrike" kern="1200" cap="none" spc="0" normalizeH="0" baseline="0" noProof="0" dirty="0">
                 <a:ln>
                   <a:noFill/>
                 </a:ln>
@@ -4871,7 +4871,7 @@
                 <a:ea typeface="ＭＳ Ｐゴシック" charset="0"/>
                 <a:cs typeface="Arial"/>
               </a:rPr>
-              <a:t>Liderar la evolución del portafolio de productos y servicios OXXO Cel, incluyendo telefonía, eSIM, bundles, servicios digitales y nuevas propuestas, alineadas a las necesidades del cliente y a las tendencias del mercado.</a:t>
+              <a:t>Liderar la evolución del portafolio de productos y servicios OXXO Cel, incluyendo telefonía, eSIM, bundles, servicios digitales y nuevas propuestas, alineadas a las necesidades del cliente y las tendencias del mercado.</a:t>
             </a:r>
           </a:p>
           <a:p>
@@ -4895,7 +4895,7 @@
               <a:defRPr/>
             </a:pPr>
             <a:r>
-              <a:rPr kumimoji="0" lang="es-MX" sz="800" b="0" i="0" u="none" strike="noStrike" kern="1200" cap="none" spc="0" normalizeH="0" baseline="0" noProof="0" dirty="0">
+              <a:rPr kumimoji="0" lang="es-MX" sz="900" b="0" i="0" u="none" strike="noStrike" kern="1200" cap="none" spc="0" normalizeH="0" baseline="0" noProof="0" dirty="0">
                 <a:ln>
                   <a:noFill/>
                 </a:ln>
@@ -4909,7 +4909,7 @@
                 <a:ea typeface="ＭＳ Ｐゴシック" charset="0"/>
                 <a:cs typeface="Arial"/>
               </a:rPr>
-              <a:t>Asegurar una experiencia de cliente consistente y diferenciada, integrando estrategias de CX, comunicación, fidelización y retención que incrementen la permanencia, reduzcan churn y maximicen el valor del cliente.</a:t>
+              <a:t>Asegurar una experiencia de cliente consistente y diferenciada, integrando estrategias de CX, fidelización y retención que incrementen la permanencia, reduzcan churn y maximicen el valor del cliente.</a:t>
             </a:r>
           </a:p>
           <a:p>
@@ -4933,7 +4933,7 @@
               <a:defRPr/>
             </a:pPr>
             <a:r>
-              <a:rPr kumimoji="0" lang="es-MX" sz="800" b="0" i="0" u="none" strike="noStrike" kern="1200" cap="none" spc="0" normalizeH="0" baseline="0" noProof="0" dirty="0">
+              <a:rPr kumimoji="0" lang="es-MX" sz="900" b="0" i="0" u="none" strike="noStrike" kern="1200" cap="none" spc="0" normalizeH="0" baseline="0" noProof="0" dirty="0">
                 <a:ln>
                   <a:noFill/>
                 </a:ln>
@@ -4947,7 +4947,7 @@
                 <a:ea typeface="ＭＳ Ｐゴシック" charset="0"/>
                 <a:cs typeface="Arial"/>
               </a:rPr>
-              <a:t>Garantizar la correcta operación integral del negocio, asegurando la continuidad del servicio de líneas, chips, dispositivos y usuarios activos, así como la ejecución eficiente de procesos operativos en tienda y canales digitales.</a:t>
+              <a:t>Garantizar la correcta operación integral del negocio, asegurando continuidad del servicio de líneas, chips, dispositivos y usuarios activos, así como ejecución eficiente de procesos en tienda y canales digitales.</a:t>
             </a:r>
           </a:p>
           <a:p>
@@ -4971,7 +4971,7 @@
               <a:defRPr/>
             </a:pPr>
             <a:r>
-              <a:rPr kumimoji="0" lang="es-MX" sz="800" b="0" i="0" u="none" strike="noStrike" kern="1200" cap="none" spc="0" normalizeH="0" baseline="0" noProof="0" dirty="0">
+              <a:rPr kumimoji="0" lang="es-MX" sz="900" b="0" i="0" u="none" strike="noStrike" kern="1200" cap="none" spc="0" normalizeH="0" baseline="0" noProof="0" dirty="0">
                 <a:ln>
                   <a:noFill/>
                 </a:ln>
@@ -4985,7 +4985,7 @@
                 <a:ea typeface="ＭＳ Ｐゴシック" charset="0"/>
                 <a:cs typeface="Arial"/>
               </a:rPr>
-              <a:t>Dirigir la operación y ejecución comercial en tienda, asegurando capacitación, habilitación, onboarding, herramientas e incentivos que maximicen el desempeño del personal y la productividad del punto de venta.</a:t>
+              <a:t>Dirigir la operación y ejecución comercial en tienda, asegurando capacitación, habilitación, onboarding e incentivos que maximicen el desempeño del personal y la productividad del punto de venta.</a:t>
             </a:r>
           </a:p>
           <a:p>
@@ -5009,7 +5009,7 @@
               <a:defRPr/>
             </a:pPr>
             <a:r>
-              <a:rPr kumimoji="0" lang="es-MX" sz="800" b="0" i="0" u="none" strike="noStrike" kern="1200" cap="none" spc="0" normalizeH="0" baseline="0" noProof="0" dirty="0">
+              <a:rPr kumimoji="0" lang="es-MX" sz="900" b="0" i="0" u="none" strike="noStrike" kern="1200" cap="none" spc="0" normalizeH="0" baseline="0" noProof="0" dirty="0">
                 <a:ln>
                   <a:noFill/>
                 </a:ln>
@@ -5023,7 +5023,7 @@
                 <a:ea typeface="ＭＳ Ｐゴシック" charset="0"/>
                 <a:cs typeface="Arial"/>
               </a:rPr>
-              <a:t>Asegurar la operación tecnológica de OXXO Cel, incluyendo plataformas, soporte, procesos digitales, call center, medios de pago e infraestructura, impulsando la mejora continua y la eficiencia operativa.</a:t>
+              <a:t>Asegurar la operación tecnológica de OXXO Cel, incluyendo plataformas, soporte, procesos digitales, call center, medios de pago e infraestructura, impulsando mejora continua y eficiencia operativa.</a:t>
             </a:r>
           </a:p>
           <a:p>
@@ -5047,7 +5047,7 @@
               <a:defRPr/>
             </a:pPr>
             <a:r>
-              <a:rPr kumimoji="0" lang="es-MX" sz="800" b="0" i="0" u="none" strike="noStrike" kern="1200" cap="none" spc="0" normalizeH="0" baseline="0" noProof="0" dirty="0">
+              <a:rPr kumimoji="0" lang="es-MX" sz="900" b="0" i="0" u="none" strike="noStrike" kern="1200" cap="none" spc="0" normalizeH="0" baseline="0" noProof="0" dirty="0">
                 <a:ln>
                   <a:noFill/>
                 </a:ln>
@@ -5085,7 +5085,7 @@
               <a:defRPr/>
             </a:pPr>
             <a:r>
-              <a:rPr kumimoji="0" lang="es-MX" sz="800" b="0" i="0" u="none" strike="noStrike" kern="1200" cap="none" spc="0" normalizeH="0" baseline="0" noProof="0" dirty="0">
+              <a:rPr kumimoji="0" lang="es-MX" sz="900" b="0" i="0" u="none" strike="noStrike" kern="1200" cap="none" spc="0" normalizeH="0" baseline="0" noProof="0" dirty="0">
                 <a:ln>
                   <a:noFill/>
                 </a:ln>
@@ -5099,7 +5099,7 @@
                 <a:ea typeface="ＭＳ Ｐゴシック" charset="0"/>
                 <a:cs typeface="Arial"/>
               </a:rPr>
-              <a:t>Impulsar un modelo de gestión y toma de decisiones basado en datos, asegurando el uso efectivo de analítica, KPIs y dashboards para optimizar desempeño comercial, operativo, financiero y de experiencia del cliente.</a:t>
+              <a:t>Impulsar un modelo de gestión basado en datos, asegurando el uso efectivo de analítica, KPIs y dashboards para optimizar desempeño comercial, operativo, financiero y de experiencia del cliente.</a:t>
             </a:r>
           </a:p>
           <a:p>
@@ -5123,7 +5123,7 @@
               <a:defRPr/>
             </a:pPr>
             <a:r>
-              <a:rPr kumimoji="0" lang="es-MX" sz="800" b="0" i="0" u="none" strike="noStrike" kern="1200" cap="none" spc="0" normalizeH="0" baseline="0" noProof="0" dirty="0">
+              <a:rPr kumimoji="0" lang="es-MX" sz="900" b="0" i="0" u="none" strike="noStrike" kern="1200" cap="none" spc="0" normalizeH="0" baseline="0" noProof="0" dirty="0">
                 <a:ln>
                   <a:noFill/>
                 </a:ln>
@@ -5137,7 +5137,7 @@
                 <a:ea typeface="ＭＳ Ｐゴシック" charset="0"/>
                 <a:cs typeface="Arial"/>
               </a:rPr>
-              <a:t>Coordinar y alinear equipos multidisciplinarios y stakeholders internos, asegurando claridad de objetivos, ejecución integrada, cumplimiento de indicadores clave y representación efectiva del negocio en foros estratégicos.</a:t>
+              <a:t>Coordinar y alinear equipos multidisciplinarios y stakeholders internos, asegurando claridad de objetivos, ejecución integrada y representación efectiva del negocio en foros estratégicos.</a:t>
             </a:r>
           </a:p>
         </p:txBody>
@@ -5417,7 +5417,7 @@
               <a:defRPr/>
             </a:pPr>
             <a:r>
-              <a:rPr lang="es-MX" sz="1000" dirty="0">
+              <a:rPr lang="es-MX" sz="900" dirty="0" b="0">
                 <a:solidFill>
                   <a:prstClr val="black"/>
                 </a:solidFill>
@@ -5461,7 +5461,7 @@
               <a:defRPr/>
             </a:pPr>
             <a:r>
-              <a:rPr lang="es-MX" sz="1000" dirty="0">
+              <a:rPr lang="es-MX" sz="900" dirty="0" b="0">
                 <a:solidFill>
                   <a:prstClr val="black"/>
                 </a:solidFill>
@@ -5505,7 +5505,7 @@
               <a:defRPr/>
             </a:pPr>
             <a:r>
-              <a:rPr lang="es-MX" sz="1000" dirty="0">
+              <a:rPr lang="es-MX" sz="900" dirty="0" b="0">
                 <a:solidFill>
                   <a:prstClr val="black"/>
                 </a:solidFill>
@@ -5549,7 +5549,7 @@
               <a:defRPr/>
             </a:pPr>
             <a:r>
-              <a:rPr lang="es-MX" sz="1000" dirty="0">
+              <a:rPr lang="es-MX" sz="900" dirty="0" b="0">
                 <a:solidFill>
                   <a:prstClr val="black"/>
                 </a:solidFill>
@@ -5593,7 +5593,7 @@
               <a:defRPr/>
             </a:pPr>
             <a:r>
-              <a:rPr lang="es-MX" sz="1000" dirty="0">
+              <a:rPr lang="es-MX" sz="900" dirty="0" b="0">
                 <a:solidFill>
                   <a:prstClr val="black"/>
                 </a:solidFill>
@@ -5893,7 +5893,7 @@
               <a:defRPr/>
             </a:pPr>
             <a:r>
-              <a:rPr lang="es-MX" sz="1000" dirty="0">
+              <a:rPr lang="es-MX" sz="900" dirty="0" b="0">
                 <a:solidFill>
                   <a:prstClr val="black"/>
                 </a:solidFill>
@@ -5937,7 +5937,7 @@
               <a:defRPr/>
             </a:pPr>
             <a:r>
-              <a:rPr lang="es-MX" sz="1000" dirty="0">
+              <a:rPr lang="es-MX" sz="900" dirty="0" b="0">
                 <a:solidFill>
                   <a:prstClr val="black"/>
                 </a:solidFill>
@@ -5981,7 +5981,7 @@
               <a:defRPr/>
             </a:pPr>
             <a:r>
-              <a:rPr lang="es-MX" sz="1000" dirty="0">
+              <a:rPr lang="es-MX" sz="900" dirty="0" b="0">
                 <a:solidFill>
                   <a:prstClr val="black"/>
                 </a:solidFill>
@@ -6025,13 +6025,13 @@
               <a:defRPr/>
             </a:pPr>
             <a:r>
-              <a:rPr lang="es-MX" sz="1000" dirty="0">
+              <a:rPr lang="es-MX" sz="900" dirty="0" b="0">
                 <a:solidFill>
                   <a:prstClr val="black"/>
                 </a:solidFill>
                 <a:latin typeface="Calibri Light" panose="020F0302020204030204"/>
               </a:rPr>
-              <a:t>Reducir churn y aumentar el valor del cliente, asegurando una experiencia consistente en múltiples puntos de contacto.</a:t>
+              <a:t>Reducir churn y aumentar el valor del cliente, asegurando experiencia consistente en múltiples puntos de contacto.</a:t>
             </a:r>
             <a:endParaRPr kumimoji="0" lang="es-MX" sz="1000" b="0" i="0" u="none" strike="noStrike" kern="1200" cap="none" spc="0" normalizeH="0" baseline="0" noProof="0" dirty="0">
               <a:ln>
@@ -6069,7 +6069,7 @@
               <a:defRPr/>
             </a:pPr>
             <a:r>
-              <a:rPr lang="es-MX" sz="1000" dirty="0">
+              <a:rPr lang="es-MX" sz="900" dirty="0" b="0">
                 <a:solidFill>
                   <a:prstClr val="black"/>
                 </a:solidFill>
@@ -9624,7 +9624,24 @@
                 <a:ea typeface="ＭＳ Ｐゴシック" charset="0"/>
                 <a:cs typeface="Arial"/>
               </a:rPr>
-              <a:t>Negocios: OXXO México</a:t>
+              <a:t>Negocios: </a:t>
+            </a:r>
+            <a:r>
+              <a:rPr kumimoji="0" lang="es-MX" sz="1200" b="0" i="0" u="none" strike="noStrike" kern="1200" cap="none" spc="0" normalizeH="0" baseline="0" noProof="0" dirty="0">
+                <a:ln>
+                  <a:noFill/>
+                </a:ln>
+                <a:solidFill>
+                  <a:prstClr val="black"/>
+                </a:solidFill>
+                <a:effectLst/>
+                <a:uLnTx/>
+                <a:uFillTx/>
+                <a:latin typeface="Calibri Light" panose="020F0302020204030204"/>
+                <a:ea typeface="ＭＳ Ｐゴシック" charset="0"/>
+                <a:cs typeface="Arial"/>
+              </a:rPr>
+              <a:t>OXXO México</a:t>
             </a:r>
             <a:endParaRPr kumimoji="0" lang="es-MX" sz="1200" b="0" i="0" u="none" strike="noStrike" kern="1200" cap="none" spc="0" normalizeH="0" baseline="0" noProof="0" dirty="0">
               <a:ln>
@@ -9711,7 +9728,24 @@
                 <a:ea typeface="ＭＳ Ｐゴシック" charset="0"/>
                 <a:cs typeface="Arial"/>
               </a:rPr>
-              <a:t>Alcance Geográfico: Nacional</a:t>
+              <a:t>Alcance Geográfico: </a:t>
+            </a:r>
+            <a:r>
+              <a:rPr kumimoji="0" lang="es-MX" sz="1200" b="0" i="0" u="none" strike="noStrike" kern="1200" cap="none" spc="0" normalizeH="0" baseline="0" noProof="0" dirty="0">
+                <a:ln>
+                  <a:noFill/>
+                </a:ln>
+                <a:solidFill>
+                  <a:prstClr val="black"/>
+                </a:solidFill>
+                <a:effectLst/>
+                <a:uLnTx/>
+                <a:uFillTx/>
+                <a:latin typeface="Calibri Light" panose="020F0302020204030204"/>
+                <a:ea typeface="ＭＳ Ｐゴシック" charset="0"/>
+                <a:cs typeface="Arial"/>
+              </a:rPr>
+              <a:t>Nacional</a:t>
             </a:r>
             <a:endParaRPr kumimoji="0" lang="es-MX" sz="1200" b="0" i="0" u="none" strike="noStrike" kern="1200" cap="none" spc="0" normalizeH="0" baseline="0" noProof="0" dirty="0">
               <a:ln>
@@ -9798,7 +9832,24 @@
                 <a:ea typeface="ＭＳ Ｐゴシック" charset="0"/>
                 <a:cs typeface="Arial"/>
               </a:rPr>
-              <a:t>Tramo de supervisión: 5 reportes directos</a:t>
+              <a:t>Tramo de supervisión: </a:t>
+            </a:r>
+            <a:r>
+              <a:rPr kumimoji="0" lang="es-MX" sz="1200" b="0" i="0" u="none" strike="noStrike" kern="1200" cap="none" spc="0" normalizeH="0" baseline="0" noProof="0" dirty="0">
+                <a:ln>
+                  <a:noFill/>
+                </a:ln>
+                <a:solidFill>
+                  <a:prstClr val="black"/>
+                </a:solidFill>
+                <a:effectLst/>
+                <a:uLnTx/>
+                <a:uFillTx/>
+                <a:latin typeface="Calibri Light" panose="020F0302020204030204"/>
+                <a:ea typeface="ＭＳ Ｐゴシック" charset="0"/>
+                <a:cs typeface="Arial"/>
+              </a:rPr>
+              <a:t>5 reportes directos</a:t>
             </a:r>
           </a:p>
           <a:p>
@@ -10150,7 +10201,7 @@
               <a:defRPr/>
             </a:pPr>
             <a:r>
-              <a:rPr kumimoji="0" lang="es-MX" sz="1200" b="1" i="0" u="none" strike="noStrike" kern="1200" cap="none" spc="0" normalizeH="0" baseline="0" noProof="0" dirty="0">
+              <a:rPr kumimoji="0" lang="es-MX" sz="900" b="1" i="0" u="none" strike="noStrike" kern="1200" cap="none" spc="0" normalizeH="0" baseline="0" noProof="0" dirty="0">
                 <a:ln>
                   <a:noFill/>
                 </a:ln>
@@ -10164,7 +10215,24 @@
                 <a:ea typeface="ＭＳ Ｐゴシック" charset="0"/>
                 <a:cs typeface="Arial"/>
               </a:rPr>
-              <a:t>Reportes Directos: Analista Operación Teléfonos y Chips (Leonardo Hernández), Coordinador Product Owner CX (Verónica González), Coordinador Comercial Fidelización Clientes (Antonio Salazar), Analista Datos (Kleist Jimenez), Gerente Área Adquisición Cliente (Daniel Pardo)</a:t>
+              <a:t>Reportes Directos: </a:t>
+            </a:r>
+            <a:r>
+              <a:rPr kumimoji="0" lang="es-MX" sz="900" b="0" i="0" u="none" strike="noStrike" kern="1200" cap="none" spc="0" normalizeH="0" baseline="0" noProof="0" dirty="0">
+                <a:ln>
+                  <a:noFill/>
+                </a:ln>
+                <a:solidFill>
+                  <a:prstClr val="black"/>
+                </a:solidFill>
+                <a:effectLst/>
+                <a:uLnTx/>
+                <a:uFillTx/>
+                <a:latin typeface="Calibri Light" panose="020F0302020204030204"/>
+                <a:ea typeface="ＭＳ Ｐゴシック" charset="0"/>
+                <a:cs typeface="Arial"/>
+              </a:rPr>
+              <a:t>Analista Operación Teléfonos y Chips (Leonardo Hernández), Coordinador Product Owner CX (Verónica González), Coordinador Comercial Fidelización Clientes (Antonio Salazar), Analista Datos (Kleist Jimenez), Gerente Área Adquisición Cliente (Daniel Pardo)</a:t>
             </a:r>
             <a:endParaRPr kumimoji="0" lang="es-MX" sz="1200" b="0" i="0" u="none" strike="noStrike" kern="1200" cap="none" spc="0" normalizeH="0" baseline="0" noProof="0" dirty="0">
               <a:ln>
@@ -10202,7 +10270,7 @@
               <a:defRPr/>
             </a:pPr>
             <a:r>
-              <a:rPr kumimoji="0" lang="es-MX" sz="1200" b="1" i="0" u="none" strike="noStrike" kern="1200" cap="none" spc="0" normalizeH="0" baseline="0" noProof="0" dirty="0">
+              <a:rPr kumimoji="0" lang="es-MX" sz="900" b="1" i="0" u="none" strike="noStrike" kern="1200" cap="none" spc="0" normalizeH="0" baseline="0" noProof="0" dirty="0">
                 <a:ln>
                   <a:noFill/>
                 </a:ln>
@@ -10216,7 +10284,24 @@
                 <a:ea typeface="ＭＳ Ｐゴシック" charset="0"/>
                 <a:cs typeface="Arial"/>
               </a:rPr>
-              <a:t>Pares: Gerente Sr Fullfilment, Gerente Sr Comercial Servicios Financieros, Gerente Sr Comercial Comercio Electrónico</a:t>
+              <a:t>Pares: </a:t>
+            </a:r>
+            <a:r>
+              <a:rPr kumimoji="0" lang="es-MX" sz="900" b="0" i="0" u="none" strike="noStrike" kern="1200" cap="none" spc="0" normalizeH="0" baseline="0" noProof="0" dirty="0">
+                <a:ln>
+                  <a:noFill/>
+                </a:ln>
+                <a:solidFill>
+                  <a:prstClr val="black"/>
+                </a:solidFill>
+                <a:effectLst/>
+                <a:uLnTx/>
+                <a:uFillTx/>
+                <a:latin typeface="Calibri Light" panose="020F0302020204030204"/>
+                <a:ea typeface="ＭＳ Ｐゴシック" charset="0"/>
+                <a:cs typeface="Arial"/>
+              </a:rPr>
+              <a:t>Gerente Sr Fullfilment, Gerente Sr Comercial Servicios Financieros, Gerente Sr Comercial Comercio Electrónico</a:t>
             </a:r>
             <a:endParaRPr kumimoji="0" lang="es-MX" sz="1200" b="0" i="0" u="none" strike="noStrike" kern="1200" cap="none" spc="0" normalizeH="0" baseline="0" noProof="0" dirty="0">
               <a:ln>
@@ -11961,6 +12046,7 @@
                         <a:cs typeface="Arial" panose="020B0604020202020204" pitchFamily="34" charset="0"/>
                       </a:endParaRPr>
                       <a:r>
+                        <a:rPr sz="1050" b="0"/>
                         <a:t>Director Estrategia y Transformación</a:t>
                       </a:r>
                     </a:p>
@@ -12024,7 +12110,8 @@
                         <a:cs typeface="Arial" panose="020B0604020202020204" pitchFamily="34" charset="0"/>
                       </a:endParaRPr>
                       <a:r>
-                        <a:t>Alineación estratégica y reporte de resultados del negocio OXXO Cel</a:t>
+                        <a:rPr sz="1050" b="0"/>
+                        <a:t>Alineación estratégica y reporte de resultados</a:t>
                       </a:r>
                     </a:p>
                   </a:txBody>
@@ -12101,6 +12188,7 @@
                         <a:cs typeface="Arial" panose="020B0604020202020204" pitchFamily="34" charset="0"/>
                       </a:endParaRPr>
                       <a:r>
+                        <a:rPr sz="1050" b="0"/>
                         <a:t>Mensual</a:t>
                       </a:r>
                     </a:p>
@@ -12158,6 +12246,7 @@
                     <a:p>
                       <a:endParaRPr lang="es-MX"/>
                       <a:r>
+                        <a:rPr sz="900" b="1"/>
                         <a:t/>
                       </a:r>
                     </a:p>
@@ -12184,6 +12273,7 @@
                         <a:cs typeface="Arial" panose="020B0604020202020204" pitchFamily="34" charset="0"/>
                       </a:endParaRPr>
                       <a:r>
+                        <a:rPr sz="1050" b="0"/>
                         <a:t>Gerente Sr Fullfilment</a:t>
                       </a:r>
                     </a:p>
@@ -12250,7 +12340,8 @@
                         <a:cs typeface="Arial" panose="020B0604020202020204" pitchFamily="34" charset="0"/>
                       </a:endParaRPr>
                       <a:r>
-                        <a:t>Coordinación de servicios y experiencia del cliente</a:t>
+                        <a:rPr sz="1050" b="0"/>
+                        <a:t>Coordinación de servicios digitales y experiencia del cliente</a:t>
                       </a:r>
                     </a:p>
                   </a:txBody>
@@ -12327,6 +12418,7 @@
                         <a:cs typeface="Arial" panose="020B0604020202020204" pitchFamily="34" charset="0"/>
                       </a:endParaRPr>
                       <a:r>
+                        <a:rPr sz="1050" b="0"/>
                         <a:t>Semanal</a:t>
                       </a:r>
                     </a:p>
@@ -12384,6 +12476,7 @@
                     <a:p>
                       <a:endParaRPr lang="es-MX"/>
                       <a:r>
+                        <a:rPr sz="900" b="1"/>
                         <a:t/>
                       </a:r>
                     </a:p>
@@ -12410,6 +12503,7 @@
                         <a:cs typeface="Arial" panose="020B0604020202020204" pitchFamily="34" charset="0"/>
                       </a:endParaRPr>
                       <a:r>
+                        <a:rPr sz="1050" b="0"/>
                         <a:t>Áreas Comerciales y Operaciones</a:t>
                       </a:r>
                     </a:p>
@@ -12487,6 +12581,7 @@
                         <a:cs typeface="Arial" panose="020B0604020202020204" pitchFamily="34" charset="0"/>
                       </a:endParaRPr>
                       <a:r>
+                        <a:rPr sz="1050" b="0"/>
                         <a:t>Ejecución comercial y operativa en tienda</a:t>
                       </a:r>
                     </a:p>
@@ -12564,6 +12659,7 @@
                         <a:cs typeface="Arial" panose="020B0604020202020204" pitchFamily="34" charset="0"/>
                       </a:endParaRPr>
                       <a:r>
+                        <a:rPr sz="1050" b="0"/>
                         <a:t>Semanal</a:t>
                       </a:r>
                     </a:p>
@@ -12621,6 +12717,7 @@
                     <a:p>
                       <a:endParaRPr lang="es-MX"/>
                       <a:r>
+                        <a:rPr sz="900" b="1"/>
                         <a:t/>
                       </a:r>
                     </a:p>
@@ -12647,6 +12744,7 @@
                         <a:cs typeface="Arial" panose="020B0604020202020204" pitchFamily="34" charset="0"/>
                       </a:endParaRPr>
                       <a:r>
+                        <a:rPr sz="1050" b="0"/>
                         <a:t>TI</a:t>
                       </a:r>
                     </a:p>
@@ -12724,6 +12822,7 @@
                         <a:cs typeface="Arial" panose="020B0604020202020204" pitchFamily="34" charset="0"/>
                       </a:endParaRPr>
                       <a:r>
+                        <a:rPr sz="1050" b="0"/>
                         <a:t>Soporte tecnológico a plataformas y sistemas OXXO Cel</a:t>
                       </a:r>
                     </a:p>
@@ -12801,6 +12900,7 @@
                         <a:cs typeface="Arial" panose="020B0604020202020204" pitchFamily="34" charset="0"/>
                       </a:endParaRPr>
                       <a:r>
+                        <a:rPr sz="1050" b="0"/>
                         <a:t>Quincenal</a:t>
                       </a:r>
                     </a:p>
@@ -12858,6 +12958,7 @@
                     <a:p>
                       <a:endParaRPr lang="es-MX"/>
                       <a:r>
+                        <a:rPr sz="900" b="1"/>
                         <a:t>EXTERNAS</a:t>
                       </a:r>
                     </a:p>
@@ -12884,6 +12985,7 @@
                         <a:cs typeface="Arial" panose="020B0604020202020204" pitchFamily="34" charset="0"/>
                       </a:endParaRPr>
                       <a:r>
+                        <a:rPr sz="1050" b="0"/>
                         <a:t>Proveedores estratégicos (Telcel, fabricantes)</a:t>
                       </a:r>
                     </a:p>
@@ -12961,6 +13063,7 @@
                         <a:cs typeface="Arial" panose="020B0604020202020204" pitchFamily="34" charset="0"/>
                       </a:endParaRPr>
                       <a:r>
+                        <a:rPr sz="1050" b="0"/>
                         <a:t>Negociación y gestión de relaciones comerciales</a:t>
                       </a:r>
                     </a:p>
@@ -13038,6 +13141,7 @@
                         <a:cs typeface="Arial" panose="020B0604020202020204" pitchFamily="34" charset="0"/>
                       </a:endParaRPr>
                       <a:r>
+                        <a:rPr sz="1050" b="0"/>
                         <a:t>Mensual</a:t>
                       </a:r>
                     </a:p>
